--- a/lectureNotes/pptx/AI_Programming_with_AI_Week01.pptx
+++ b/lectureNotes/pptx/AI_Programming_with_AI_Week01.pptx
@@ -140,20 +140,12 @@
 </p:presentation>
 </file>
 
-<file path=ppt/revisionInfo.xml><?xml version="1.0" encoding="utf-8"?>
-<p1510:revInfo xmlns:a="http://schemas.openxmlformats.org/drawingml/2006/main" xmlns:r="http://schemas.openxmlformats.org/officeDocument/2006/relationships" xmlns:p1510="http://schemas.microsoft.com/office/powerpoint/2015/10/main">
-  <p1510:revLst>
-    <p1510:client id="{1D1D4C5F-07E1-415E-B876-889461BBEB64}" v="1" dt="2026-02-20T09:03:43.187"/>
-  </p1510:revLst>
-</p1510:revInfo>
-</file>
-
 <file path=ppt/changesInfos/changesInfo1.xml><?xml version="1.0" encoding="utf-8"?>
 <pc:chgInfo xmlns:a="http://schemas.openxmlformats.org/drawingml/2006/main" xmlns:r="http://schemas.openxmlformats.org/officeDocument/2006/relationships" xmlns:ac="http://schemas.microsoft.com/office/drawing/2013/main/command" xmlns:pc="http://schemas.microsoft.com/office/powerpoint/2013/main/command">
   <pc:docChgLst>
     <pc:chgData name="Youngho Lee" userId="8d4cb33d81fe8010" providerId="LiveId" clId="{95971DB8-E339-4B32-80CF-0D8F9D8B87F2}"/>
     <pc:docChg chg="undo custSel addSld modSld">
-      <pc:chgData name="Youngho Lee" userId="8d4cb33d81fe8010" providerId="LiveId" clId="{95971DB8-E339-4B32-80CF-0D8F9D8B87F2}" dt="2026-02-20T09:03:50.445" v="51" actId="20577"/>
+      <pc:chgData name="Youngho Lee" userId="8d4cb33d81fe8010" providerId="LiveId" clId="{95971DB8-E339-4B32-80CF-0D8F9D8B87F2}" dt="2026-03-10T06:55:43.722" v="60" actId="478"/>
       <pc:docMkLst>
         <pc:docMk/>
       </pc:docMkLst>
@@ -163,14 +155,6 @@
           <pc:docMk/>
           <pc:sldMk cId="0" sldId="256"/>
         </pc:sldMkLst>
-        <pc:spChg chg="del">
-          <ac:chgData name="Youngho Lee" userId="8d4cb33d81fe8010" providerId="LiveId" clId="{95971DB8-E339-4B32-80CF-0D8F9D8B87F2}" dt="2026-02-20T08:50:22.689" v="0" actId="478"/>
-          <ac:spMkLst>
-            <pc:docMk/>
-            <pc:sldMk cId="0" sldId="256"/>
-            <ac:spMk id="7" creationId="{00000000-0000-0000-0000-000000000000}"/>
-          </ac:spMkLst>
-        </pc:spChg>
       </pc:sldChg>
       <pc:sldChg chg="addSp delSp mod">
         <pc:chgData name="Youngho Lee" userId="8d4cb33d81fe8010" providerId="LiveId" clId="{95971DB8-E339-4B32-80CF-0D8F9D8B87F2}" dt="2026-02-20T09:02:54.315" v="48" actId="22"/>
@@ -178,22 +162,6 @@
           <pc:docMk/>
           <pc:sldMk cId="0" sldId="257"/>
         </pc:sldMkLst>
-        <pc:spChg chg="del">
-          <ac:chgData name="Youngho Lee" userId="8d4cb33d81fe8010" providerId="LiveId" clId="{95971DB8-E339-4B32-80CF-0D8F9D8B87F2}" dt="2026-02-20T08:54:02.895" v="46" actId="478"/>
-          <ac:spMkLst>
-            <pc:docMk/>
-            <pc:sldMk cId="0" sldId="257"/>
-            <ac:spMk id="6" creationId="{00000000-0000-0000-0000-000000000000}"/>
-          </ac:spMkLst>
-        </pc:spChg>
-        <pc:spChg chg="add del">
-          <ac:chgData name="Youngho Lee" userId="8d4cb33d81fe8010" providerId="LiveId" clId="{95971DB8-E339-4B32-80CF-0D8F9D8B87F2}" dt="2026-02-20T09:02:54.315" v="48" actId="22"/>
-          <ac:spMkLst>
-            <pc:docMk/>
-            <pc:sldMk cId="0" sldId="257"/>
-            <ac:spMk id="12" creationId="{7F6413B8-9584-CD5D-7E29-07CEF91C4F00}"/>
-          </ac:spMkLst>
-        </pc:spChg>
       </pc:sldChg>
       <pc:sldChg chg="delSp mod">
         <pc:chgData name="Youngho Lee" userId="8d4cb33d81fe8010" providerId="LiveId" clId="{95971DB8-E339-4B32-80CF-0D8F9D8B87F2}" dt="2026-02-20T08:54:00.898" v="45" actId="478"/>
@@ -201,27 +169,59 @@
           <pc:docMk/>
           <pc:sldMk cId="0" sldId="258"/>
         </pc:sldMkLst>
-        <pc:spChg chg="del">
-          <ac:chgData name="Youngho Lee" userId="8d4cb33d81fe8010" providerId="LiveId" clId="{95971DB8-E339-4B32-80CF-0D8F9D8B87F2}" dt="2026-02-20T08:54:00.898" v="45" actId="478"/>
-          <ac:spMkLst>
-            <pc:docMk/>
-            <pc:sldMk cId="0" sldId="258"/>
-            <ac:spMk id="6" creationId="{00000000-0000-0000-0000-000000000000}"/>
-          </ac:spMkLst>
-        </pc:spChg>
       </pc:sldChg>
-      <pc:sldChg chg="delSp mod">
-        <pc:chgData name="Youngho Lee" userId="8d4cb33d81fe8010" providerId="LiveId" clId="{95971DB8-E339-4B32-80CF-0D8F9D8B87F2}" dt="2026-02-20T08:53:58.489" v="44" actId="478"/>
+      <pc:sldChg chg="addSp delSp modSp mod">
+        <pc:chgData name="Youngho Lee" userId="8d4cb33d81fe8010" providerId="LiveId" clId="{95971DB8-E339-4B32-80CF-0D8F9D8B87F2}" dt="2026-03-10T06:55:43.722" v="60" actId="478"/>
         <pc:sldMkLst>
           <pc:docMk/>
           <pc:sldMk cId="0" sldId="259"/>
         </pc:sldMkLst>
-        <pc:spChg chg="del">
-          <ac:chgData name="Youngho Lee" userId="8d4cb33d81fe8010" providerId="LiveId" clId="{95971DB8-E339-4B32-80CF-0D8F9D8B87F2}" dt="2026-02-20T08:53:58.489" v="44" actId="478"/>
+        <pc:spChg chg="add del">
+          <ac:chgData name="Youngho Lee" userId="8d4cb33d81fe8010" providerId="LiveId" clId="{95971DB8-E339-4B32-80CF-0D8F9D8B87F2}" dt="2026-03-10T06:55:43.722" v="60" actId="478"/>
           <ac:spMkLst>
             <pc:docMk/>
             <pc:sldMk cId="0" sldId="259"/>
-            <ac:spMk id="6" creationId="{00000000-0000-0000-0000-000000000000}"/>
+            <ac:spMk id="12" creationId="{00000000-0000-0000-0000-000000000000}"/>
+          </ac:spMkLst>
+        </pc:spChg>
+        <pc:spChg chg="add del">
+          <ac:chgData name="Youngho Lee" userId="8d4cb33d81fe8010" providerId="LiveId" clId="{95971DB8-E339-4B32-80CF-0D8F9D8B87F2}" dt="2026-03-10T06:55:22.672" v="53" actId="478"/>
+          <ac:spMkLst>
+            <pc:docMk/>
+            <pc:sldMk cId="0" sldId="259"/>
+            <ac:spMk id="13" creationId="{00000000-0000-0000-0000-000000000000}"/>
+          </ac:spMkLst>
+        </pc:spChg>
+        <pc:spChg chg="add del">
+          <ac:chgData name="Youngho Lee" userId="8d4cb33d81fe8010" providerId="LiveId" clId="{95971DB8-E339-4B32-80CF-0D8F9D8B87F2}" dt="2026-03-10T06:55:41.368" v="59" actId="478"/>
+          <ac:spMkLst>
+            <pc:docMk/>
+            <pc:sldMk cId="0" sldId="259"/>
+            <ac:spMk id="14" creationId="{00000000-0000-0000-0000-000000000000}"/>
+          </ac:spMkLst>
+        </pc:spChg>
+        <pc:spChg chg="add del">
+          <ac:chgData name="Youngho Lee" userId="8d4cb33d81fe8010" providerId="LiveId" clId="{95971DB8-E339-4B32-80CF-0D8F9D8B87F2}" dt="2026-03-10T06:55:38.901" v="58" actId="478"/>
+          <ac:spMkLst>
+            <pc:docMk/>
+            <pc:sldMk cId="0" sldId="259"/>
+            <ac:spMk id="16" creationId="{00000000-0000-0000-0000-000000000000}"/>
+          </ac:spMkLst>
+        </pc:spChg>
+        <pc:spChg chg="add del">
+          <ac:chgData name="Youngho Lee" userId="8d4cb33d81fe8010" providerId="LiveId" clId="{95971DB8-E339-4B32-80CF-0D8F9D8B87F2}" dt="2026-03-10T06:55:33.192" v="55" actId="478"/>
+          <ac:spMkLst>
+            <pc:docMk/>
+            <pc:sldMk cId="0" sldId="259"/>
+            <ac:spMk id="17" creationId="{00000000-0000-0000-0000-000000000000}"/>
+          </ac:spMkLst>
+        </pc:spChg>
+        <pc:spChg chg="add del mod">
+          <ac:chgData name="Youngho Lee" userId="8d4cb33d81fe8010" providerId="LiveId" clId="{95971DB8-E339-4B32-80CF-0D8F9D8B87F2}" dt="2026-03-10T06:55:36.653" v="57" actId="478"/>
+          <ac:spMkLst>
+            <pc:docMk/>
+            <pc:sldMk cId="0" sldId="259"/>
+            <ac:spMk id="18" creationId="{00000000-0000-0000-0000-000000000000}"/>
           </ac:spMkLst>
         </pc:spChg>
       </pc:sldChg>
@@ -231,14 +231,6 @@
           <pc:docMk/>
           <pc:sldMk cId="0" sldId="260"/>
         </pc:sldMkLst>
-        <pc:spChg chg="del">
-          <ac:chgData name="Youngho Lee" userId="8d4cb33d81fe8010" providerId="LiveId" clId="{95971DB8-E339-4B32-80CF-0D8F9D8B87F2}" dt="2026-02-20T08:53:55.685" v="43" actId="478"/>
-          <ac:spMkLst>
-            <pc:docMk/>
-            <pc:sldMk cId="0" sldId="260"/>
-            <ac:spMk id="6" creationId="{00000000-0000-0000-0000-000000000000}"/>
-          </ac:spMkLst>
-        </pc:spChg>
       </pc:sldChg>
       <pc:sldChg chg="delSp mod">
         <pc:chgData name="Youngho Lee" userId="8d4cb33d81fe8010" providerId="LiveId" clId="{95971DB8-E339-4B32-80CF-0D8F9D8B87F2}" dt="2026-02-20T08:53:51.626" v="41" actId="478"/>
@@ -246,14 +238,6 @@
           <pc:docMk/>
           <pc:sldMk cId="0" sldId="262"/>
         </pc:sldMkLst>
-        <pc:spChg chg="del">
-          <ac:chgData name="Youngho Lee" userId="8d4cb33d81fe8010" providerId="LiveId" clId="{95971DB8-E339-4B32-80CF-0D8F9D8B87F2}" dt="2026-02-20T08:53:51.626" v="41" actId="478"/>
-          <ac:spMkLst>
-            <pc:docMk/>
-            <pc:sldMk cId="0" sldId="262"/>
-            <ac:spMk id="6" creationId="{00000000-0000-0000-0000-000000000000}"/>
-          </ac:spMkLst>
-        </pc:spChg>
       </pc:sldChg>
       <pc:sldChg chg="delSp mod">
         <pc:chgData name="Youngho Lee" userId="8d4cb33d81fe8010" providerId="LiveId" clId="{95971DB8-E339-4B32-80CF-0D8F9D8B87F2}" dt="2026-02-20T08:53:42.538" v="38" actId="478"/>
@@ -261,14 +245,6 @@
           <pc:docMk/>
           <pc:sldMk cId="0" sldId="265"/>
         </pc:sldMkLst>
-        <pc:spChg chg="del">
-          <ac:chgData name="Youngho Lee" userId="8d4cb33d81fe8010" providerId="LiveId" clId="{95971DB8-E339-4B32-80CF-0D8F9D8B87F2}" dt="2026-02-20T08:53:42.538" v="38" actId="478"/>
-          <ac:spMkLst>
-            <pc:docMk/>
-            <pc:sldMk cId="0" sldId="265"/>
-            <ac:spMk id="6" creationId="{00000000-0000-0000-0000-000000000000}"/>
-          </ac:spMkLst>
-        </pc:spChg>
       </pc:sldChg>
       <pc:sldChg chg="delSp modSp mod">
         <pc:chgData name="Youngho Lee" userId="8d4cb33d81fe8010" providerId="LiveId" clId="{95971DB8-E339-4B32-80CF-0D8F9D8B87F2}" dt="2026-02-20T08:53:40.458" v="37" actId="478"/>
@@ -276,14 +252,6 @@
           <pc:docMk/>
           <pc:sldMk cId="0" sldId="266"/>
         </pc:sldMkLst>
-        <pc:spChg chg="del">
-          <ac:chgData name="Youngho Lee" userId="8d4cb33d81fe8010" providerId="LiveId" clId="{95971DB8-E339-4B32-80CF-0D8F9D8B87F2}" dt="2026-02-20T08:53:40.458" v="37" actId="478"/>
-          <ac:spMkLst>
-            <pc:docMk/>
-            <pc:sldMk cId="0" sldId="266"/>
-            <ac:spMk id="6" creationId="{00000000-0000-0000-0000-000000000000}"/>
-          </ac:spMkLst>
-        </pc:spChg>
         <pc:spChg chg="mod">
           <ac:chgData name="Youngho Lee" userId="8d4cb33d81fe8010" providerId="LiveId" clId="{95971DB8-E339-4B32-80CF-0D8F9D8B87F2}" dt="2026-02-20T08:52:02.386" v="14" actId="20577"/>
           <ac:spMkLst>
@@ -299,14 +267,6 @@
           <pc:docMk/>
           <pc:sldMk cId="0" sldId="267"/>
         </pc:sldMkLst>
-        <pc:spChg chg="del">
-          <ac:chgData name="Youngho Lee" userId="8d4cb33d81fe8010" providerId="LiveId" clId="{95971DB8-E339-4B32-80CF-0D8F9D8B87F2}" dt="2026-02-20T08:53:37.988" v="36" actId="478"/>
-          <ac:spMkLst>
-            <pc:docMk/>
-            <pc:sldMk cId="0" sldId="267"/>
-            <ac:spMk id="6" creationId="{00000000-0000-0000-0000-000000000000}"/>
-          </ac:spMkLst>
-        </pc:spChg>
       </pc:sldChg>
       <pc:sldChg chg="delSp mod">
         <pc:chgData name="Youngho Lee" userId="8d4cb33d81fe8010" providerId="LiveId" clId="{95971DB8-E339-4B32-80CF-0D8F9D8B87F2}" dt="2026-02-20T08:53:35.871" v="35" actId="478"/>
@@ -314,14 +274,6 @@
           <pc:docMk/>
           <pc:sldMk cId="0" sldId="268"/>
         </pc:sldMkLst>
-        <pc:spChg chg="del">
-          <ac:chgData name="Youngho Lee" userId="8d4cb33d81fe8010" providerId="LiveId" clId="{95971DB8-E339-4B32-80CF-0D8F9D8B87F2}" dt="2026-02-20T08:53:35.871" v="35" actId="478"/>
-          <ac:spMkLst>
-            <pc:docMk/>
-            <pc:sldMk cId="0" sldId="268"/>
-            <ac:spMk id="6" creationId="{00000000-0000-0000-0000-000000000000}"/>
-          </ac:spMkLst>
-        </pc:spChg>
       </pc:sldChg>
       <pc:sldChg chg="delSp mod">
         <pc:chgData name="Youngho Lee" userId="8d4cb33d81fe8010" providerId="LiveId" clId="{95971DB8-E339-4B32-80CF-0D8F9D8B87F2}" dt="2026-02-20T08:53:33.331" v="34" actId="478"/>
@@ -329,14 +281,6 @@
           <pc:docMk/>
           <pc:sldMk cId="0" sldId="269"/>
         </pc:sldMkLst>
-        <pc:spChg chg="del">
-          <ac:chgData name="Youngho Lee" userId="8d4cb33d81fe8010" providerId="LiveId" clId="{95971DB8-E339-4B32-80CF-0D8F9D8B87F2}" dt="2026-02-20T08:53:33.331" v="34" actId="478"/>
-          <ac:spMkLst>
-            <pc:docMk/>
-            <pc:sldMk cId="0" sldId="269"/>
-            <ac:spMk id="6" creationId="{00000000-0000-0000-0000-000000000000}"/>
-          </ac:spMkLst>
-        </pc:spChg>
       </pc:sldChg>
       <pc:sldChg chg="delSp mod">
         <pc:chgData name="Youngho Lee" userId="8d4cb33d81fe8010" providerId="LiveId" clId="{95971DB8-E339-4B32-80CF-0D8F9D8B87F2}" dt="2026-02-20T08:53:30.234" v="33" actId="478"/>
@@ -344,14 +288,6 @@
           <pc:docMk/>
           <pc:sldMk cId="0" sldId="270"/>
         </pc:sldMkLst>
-        <pc:spChg chg="del">
-          <ac:chgData name="Youngho Lee" userId="8d4cb33d81fe8010" providerId="LiveId" clId="{95971DB8-E339-4B32-80CF-0D8F9D8B87F2}" dt="2026-02-20T08:53:30.234" v="33" actId="478"/>
-          <ac:spMkLst>
-            <pc:docMk/>
-            <pc:sldMk cId="0" sldId="270"/>
-            <ac:spMk id="6" creationId="{00000000-0000-0000-0000-000000000000}"/>
-          </ac:spMkLst>
-        </pc:spChg>
       </pc:sldChg>
       <pc:sldChg chg="delSp modSp mod">
         <pc:chgData name="Youngho Lee" userId="8d4cb33d81fe8010" providerId="LiveId" clId="{95971DB8-E339-4B32-80CF-0D8F9D8B87F2}" dt="2026-02-20T08:53:24.645" v="32" actId="478"/>
@@ -359,22 +295,6 @@
           <pc:docMk/>
           <pc:sldMk cId="0" sldId="271"/>
         </pc:sldMkLst>
-        <pc:spChg chg="del">
-          <ac:chgData name="Youngho Lee" userId="8d4cb33d81fe8010" providerId="LiveId" clId="{95971DB8-E339-4B32-80CF-0D8F9D8B87F2}" dt="2026-02-20T08:53:22.910" v="30" actId="478"/>
-          <ac:spMkLst>
-            <pc:docMk/>
-            <pc:sldMk cId="0" sldId="271"/>
-            <ac:spMk id="5" creationId="{00000000-0000-0000-0000-000000000000}"/>
-          </ac:spMkLst>
-        </pc:spChg>
-        <pc:spChg chg="del mod">
-          <ac:chgData name="Youngho Lee" userId="8d4cb33d81fe8010" providerId="LiveId" clId="{95971DB8-E339-4B32-80CF-0D8F9D8B87F2}" dt="2026-02-20T08:53:24.645" v="32" actId="478"/>
-          <ac:spMkLst>
-            <pc:docMk/>
-            <pc:sldMk cId="0" sldId="271"/>
-            <ac:spMk id="6" creationId="{00000000-0000-0000-0000-000000000000}"/>
-          </ac:spMkLst>
-        </pc:spChg>
       </pc:sldChg>
       <pc:sldChg chg="delSp mod">
         <pc:chgData name="Youngho Lee" userId="8d4cb33d81fe8010" providerId="LiveId" clId="{95971DB8-E339-4B32-80CF-0D8F9D8B87F2}" dt="2026-02-20T08:53:20.977" v="29" actId="478"/>
@@ -382,14 +302,6 @@
           <pc:docMk/>
           <pc:sldMk cId="0" sldId="272"/>
         </pc:sldMkLst>
-        <pc:spChg chg="del">
-          <ac:chgData name="Youngho Lee" userId="8d4cb33d81fe8010" providerId="LiveId" clId="{95971DB8-E339-4B32-80CF-0D8F9D8B87F2}" dt="2026-02-20T08:53:20.977" v="29" actId="478"/>
-          <ac:spMkLst>
-            <pc:docMk/>
-            <pc:sldMk cId="0" sldId="272"/>
-            <ac:spMk id="6" creationId="{00000000-0000-0000-0000-000000000000}"/>
-          </ac:spMkLst>
-        </pc:spChg>
       </pc:sldChg>
       <pc:sldChg chg="delSp mod">
         <pc:chgData name="Youngho Lee" userId="8d4cb33d81fe8010" providerId="LiveId" clId="{95971DB8-E339-4B32-80CF-0D8F9D8B87F2}" dt="2026-02-20T08:53:09.105" v="24" actId="478"/>
@@ -397,14 +309,6 @@
           <pc:docMk/>
           <pc:sldMk cId="0" sldId="273"/>
         </pc:sldMkLst>
-        <pc:spChg chg="del">
-          <ac:chgData name="Youngho Lee" userId="8d4cb33d81fe8010" providerId="LiveId" clId="{95971DB8-E339-4B32-80CF-0D8F9D8B87F2}" dt="2026-02-20T08:53:09.105" v="24" actId="478"/>
-          <ac:spMkLst>
-            <pc:docMk/>
-            <pc:sldMk cId="0" sldId="273"/>
-            <ac:spMk id="6" creationId="{00000000-0000-0000-0000-000000000000}"/>
-          </ac:spMkLst>
-        </pc:spChg>
       </pc:sldChg>
       <pc:sldChg chg="delSp mod">
         <pc:chgData name="Youngho Lee" userId="8d4cb33d81fe8010" providerId="LiveId" clId="{95971DB8-E339-4B32-80CF-0D8F9D8B87F2}" dt="2026-02-20T08:53:06.309" v="23" actId="478"/>
@@ -412,14 +316,6 @@
           <pc:docMk/>
           <pc:sldMk cId="0" sldId="274"/>
         </pc:sldMkLst>
-        <pc:spChg chg="del">
-          <ac:chgData name="Youngho Lee" userId="8d4cb33d81fe8010" providerId="LiveId" clId="{95971DB8-E339-4B32-80CF-0D8F9D8B87F2}" dt="2026-02-20T08:53:06.309" v="23" actId="478"/>
-          <ac:spMkLst>
-            <pc:docMk/>
-            <pc:sldMk cId="0" sldId="274"/>
-            <ac:spMk id="6" creationId="{00000000-0000-0000-0000-000000000000}"/>
-          </ac:spMkLst>
-        </pc:spChg>
       </pc:sldChg>
       <pc:sldChg chg="delSp mod">
         <pc:chgData name="Youngho Lee" userId="8d4cb33d81fe8010" providerId="LiveId" clId="{95971DB8-E339-4B32-80CF-0D8F9D8B87F2}" dt="2026-02-20T08:53:03.451" v="22" actId="478"/>
@@ -427,14 +323,6 @@
           <pc:docMk/>
           <pc:sldMk cId="0" sldId="275"/>
         </pc:sldMkLst>
-        <pc:spChg chg="del">
-          <ac:chgData name="Youngho Lee" userId="8d4cb33d81fe8010" providerId="LiveId" clId="{95971DB8-E339-4B32-80CF-0D8F9D8B87F2}" dt="2026-02-20T08:53:03.451" v="22" actId="478"/>
-          <ac:spMkLst>
-            <pc:docMk/>
-            <pc:sldMk cId="0" sldId="275"/>
-            <ac:spMk id="6" creationId="{00000000-0000-0000-0000-000000000000}"/>
-          </ac:spMkLst>
-        </pc:spChg>
       </pc:sldChg>
       <pc:sldChg chg="delSp mod">
         <pc:chgData name="Youngho Lee" userId="8d4cb33d81fe8010" providerId="LiveId" clId="{95971DB8-E339-4B32-80CF-0D8F9D8B87F2}" dt="2026-02-20T08:53:00.708" v="21" actId="478"/>
@@ -442,22 +330,6 @@
           <pc:docMk/>
           <pc:sldMk cId="0" sldId="276"/>
         </pc:sldMkLst>
-        <pc:spChg chg="del">
-          <ac:chgData name="Youngho Lee" userId="8d4cb33d81fe8010" providerId="LiveId" clId="{95971DB8-E339-4B32-80CF-0D8F9D8B87F2}" dt="2026-02-20T08:52:58.730" v="20" actId="478"/>
-          <ac:spMkLst>
-            <pc:docMk/>
-            <pc:sldMk cId="0" sldId="276"/>
-            <ac:spMk id="5" creationId="{00000000-0000-0000-0000-000000000000}"/>
-          </ac:spMkLst>
-        </pc:spChg>
-        <pc:spChg chg="del">
-          <ac:chgData name="Youngho Lee" userId="8d4cb33d81fe8010" providerId="LiveId" clId="{95971DB8-E339-4B32-80CF-0D8F9D8B87F2}" dt="2026-02-20T08:53:00.708" v="21" actId="478"/>
-          <ac:spMkLst>
-            <pc:docMk/>
-            <pc:sldMk cId="0" sldId="276"/>
-            <ac:spMk id="6" creationId="{00000000-0000-0000-0000-000000000000}"/>
-          </ac:spMkLst>
-        </pc:spChg>
       </pc:sldChg>
       <pc:sldChg chg="delSp mod">
         <pc:chgData name="Youngho Lee" userId="8d4cb33d81fe8010" providerId="LiveId" clId="{95971DB8-E339-4B32-80CF-0D8F9D8B87F2}" dt="2026-02-20T08:52:56.226" v="19" actId="478"/>
@@ -465,14 +337,6 @@
           <pc:docMk/>
           <pc:sldMk cId="0" sldId="277"/>
         </pc:sldMkLst>
-        <pc:spChg chg="del">
-          <ac:chgData name="Youngho Lee" userId="8d4cb33d81fe8010" providerId="LiveId" clId="{95971DB8-E339-4B32-80CF-0D8F9D8B87F2}" dt="2026-02-20T08:52:56.226" v="19" actId="478"/>
-          <ac:spMkLst>
-            <pc:docMk/>
-            <pc:sldMk cId="0" sldId="277"/>
-            <ac:spMk id="6" creationId="{00000000-0000-0000-0000-000000000000}"/>
-          </ac:spMkLst>
-        </pc:spChg>
       </pc:sldChg>
       <pc:sldChg chg="delSp mod">
         <pc:chgData name="Youngho Lee" userId="8d4cb33d81fe8010" providerId="LiveId" clId="{95971DB8-E339-4B32-80CF-0D8F9D8B87F2}" dt="2026-02-20T08:52:53.963" v="18" actId="478"/>
@@ -480,14 +344,6 @@
           <pc:docMk/>
           <pc:sldMk cId="0" sldId="278"/>
         </pc:sldMkLst>
-        <pc:spChg chg="del">
-          <ac:chgData name="Youngho Lee" userId="8d4cb33d81fe8010" providerId="LiveId" clId="{95971DB8-E339-4B32-80CF-0D8F9D8B87F2}" dt="2026-02-20T08:52:53.963" v="18" actId="478"/>
-          <ac:spMkLst>
-            <pc:docMk/>
-            <pc:sldMk cId="0" sldId="278"/>
-            <ac:spMk id="6" creationId="{00000000-0000-0000-0000-000000000000}"/>
-          </ac:spMkLst>
-        </pc:spChg>
       </pc:sldChg>
       <pc:sldChg chg="delSp mod">
         <pc:chgData name="Youngho Lee" userId="8d4cb33d81fe8010" providerId="LiveId" clId="{95971DB8-E339-4B32-80CF-0D8F9D8B87F2}" dt="2026-02-20T08:52:47.243" v="16" actId="478"/>
@@ -495,14 +351,6 @@
           <pc:docMk/>
           <pc:sldMk cId="0" sldId="279"/>
         </pc:sldMkLst>
-        <pc:spChg chg="del">
-          <ac:chgData name="Youngho Lee" userId="8d4cb33d81fe8010" providerId="LiveId" clId="{95971DB8-E339-4B32-80CF-0D8F9D8B87F2}" dt="2026-02-20T08:52:47.243" v="16" actId="478"/>
-          <ac:spMkLst>
-            <pc:docMk/>
-            <pc:sldMk cId="0" sldId="279"/>
-            <ac:spMk id="6" creationId="{00000000-0000-0000-0000-000000000000}"/>
-          </ac:spMkLst>
-        </pc:spChg>
       </pc:sldChg>
       <pc:sldChg chg="delSp mod">
         <pc:chgData name="Youngho Lee" userId="8d4cb33d81fe8010" providerId="LiveId" clId="{95971DB8-E339-4B32-80CF-0D8F9D8B87F2}" dt="2026-02-20T08:52:50.668" v="17" actId="478"/>
@@ -510,22 +358,6 @@
           <pc:docMk/>
           <pc:sldMk cId="0" sldId="280"/>
         </pc:sldMkLst>
-        <pc:spChg chg="del">
-          <ac:chgData name="Youngho Lee" userId="8d4cb33d81fe8010" providerId="LiveId" clId="{95971DB8-E339-4B32-80CF-0D8F9D8B87F2}" dt="2026-02-20T08:52:44.982" v="15" actId="478"/>
-          <ac:spMkLst>
-            <pc:docMk/>
-            <pc:sldMk cId="0" sldId="280"/>
-            <ac:spMk id="5" creationId="{00000000-0000-0000-0000-000000000000}"/>
-          </ac:spMkLst>
-        </pc:spChg>
-        <pc:spChg chg="del">
-          <ac:chgData name="Youngho Lee" userId="8d4cb33d81fe8010" providerId="LiveId" clId="{95971DB8-E339-4B32-80CF-0D8F9D8B87F2}" dt="2026-02-20T08:52:50.668" v="17" actId="478"/>
-          <ac:spMkLst>
-            <pc:docMk/>
-            <pc:sldMk cId="0" sldId="280"/>
-            <ac:spMk id="6" creationId="{00000000-0000-0000-0000-000000000000}"/>
-          </ac:spMkLst>
-        </pc:spChg>
       </pc:sldChg>
       <pc:sldChg chg="delSp mod">
         <pc:chgData name="Youngho Lee" userId="8d4cb33d81fe8010" providerId="LiveId" clId="{95971DB8-E339-4B32-80CF-0D8F9D8B87F2}" dt="2026-02-20T08:53:18.731" v="28" actId="478"/>
@@ -533,14 +365,6 @@
           <pc:docMk/>
           <pc:sldMk cId="2815544499" sldId="281"/>
         </pc:sldMkLst>
-        <pc:spChg chg="del">
-          <ac:chgData name="Youngho Lee" userId="8d4cb33d81fe8010" providerId="LiveId" clId="{95971DB8-E339-4B32-80CF-0D8F9D8B87F2}" dt="2026-02-20T08:53:18.731" v="28" actId="478"/>
-          <ac:spMkLst>
-            <pc:docMk/>
-            <pc:sldMk cId="2815544499" sldId="281"/>
-            <ac:spMk id="6" creationId="{00000000-0000-0000-0000-000000000000}"/>
-          </ac:spMkLst>
-        </pc:spChg>
       </pc:sldChg>
       <pc:sldChg chg="delSp mod">
         <pc:chgData name="Youngho Lee" userId="8d4cb33d81fe8010" providerId="LiveId" clId="{95971DB8-E339-4B32-80CF-0D8F9D8B87F2}" dt="2026-02-20T08:53:14.785" v="27" actId="478"/>
@@ -548,22 +372,6 @@
           <pc:docMk/>
           <pc:sldMk cId="3819390201" sldId="282"/>
         </pc:sldMkLst>
-        <pc:spChg chg="del">
-          <ac:chgData name="Youngho Lee" userId="8d4cb33d81fe8010" providerId="LiveId" clId="{95971DB8-E339-4B32-80CF-0D8F9D8B87F2}" dt="2026-02-20T08:53:13.374" v="26" actId="478"/>
-          <ac:spMkLst>
-            <pc:docMk/>
-            <pc:sldMk cId="3819390201" sldId="282"/>
-            <ac:spMk id="5" creationId="{00000000-0000-0000-0000-000000000000}"/>
-          </ac:spMkLst>
-        </pc:spChg>
-        <pc:spChg chg="del">
-          <ac:chgData name="Youngho Lee" userId="8d4cb33d81fe8010" providerId="LiveId" clId="{95971DB8-E339-4B32-80CF-0D8F9D8B87F2}" dt="2026-02-20T08:53:14.785" v="27" actId="478"/>
-          <ac:spMkLst>
-            <pc:docMk/>
-            <pc:sldMk cId="3819390201" sldId="282"/>
-            <ac:spMk id="6" creationId="{00000000-0000-0000-0000-000000000000}"/>
-          </ac:spMkLst>
-        </pc:spChg>
       </pc:sldChg>
       <pc:sldChg chg="delSp mod">
         <pc:chgData name="Youngho Lee" userId="8d4cb33d81fe8010" providerId="LiveId" clId="{95971DB8-E339-4B32-80CF-0D8F9D8B87F2}" dt="2026-02-20T08:53:11.450" v="25" actId="478"/>
@@ -571,14 +379,6 @@
           <pc:docMk/>
           <pc:sldMk cId="3233938339" sldId="283"/>
         </pc:sldMkLst>
-        <pc:spChg chg="del">
-          <ac:chgData name="Youngho Lee" userId="8d4cb33d81fe8010" providerId="LiveId" clId="{95971DB8-E339-4B32-80CF-0D8F9D8B87F2}" dt="2026-02-20T08:53:11.450" v="25" actId="478"/>
-          <ac:spMkLst>
-            <pc:docMk/>
-            <pc:sldMk cId="3233938339" sldId="283"/>
-            <ac:spMk id="6" creationId="{00000000-0000-0000-0000-000000000000}"/>
-          </ac:spMkLst>
-        </pc:spChg>
       </pc:sldChg>
       <pc:sldChg chg="delSp mod">
         <pc:chgData name="Youngho Lee" userId="8d4cb33d81fe8010" providerId="LiveId" clId="{95971DB8-E339-4B32-80CF-0D8F9D8B87F2}" dt="2026-02-20T08:53:53.805" v="42" actId="478"/>
@@ -586,14 +386,6 @@
           <pc:docMk/>
           <pc:sldMk cId="372406136" sldId="284"/>
         </pc:sldMkLst>
-        <pc:spChg chg="del">
-          <ac:chgData name="Youngho Lee" userId="8d4cb33d81fe8010" providerId="LiveId" clId="{95971DB8-E339-4B32-80CF-0D8F9D8B87F2}" dt="2026-02-20T08:53:53.805" v="42" actId="478"/>
-          <ac:spMkLst>
-            <pc:docMk/>
-            <pc:sldMk cId="372406136" sldId="284"/>
-            <ac:spMk id="6" creationId="{00000000-0000-0000-0000-000000000000}"/>
-          </ac:spMkLst>
-        </pc:spChg>
       </pc:sldChg>
       <pc:sldChg chg="delSp mod">
         <pc:chgData name="Youngho Lee" userId="8d4cb33d81fe8010" providerId="LiveId" clId="{95971DB8-E339-4B32-80CF-0D8F9D8B87F2}" dt="2026-02-20T08:53:48.576" v="40" actId="478"/>
@@ -601,14 +393,6 @@
           <pc:docMk/>
           <pc:sldMk cId="2758323687" sldId="285"/>
         </pc:sldMkLst>
-        <pc:spChg chg="del">
-          <ac:chgData name="Youngho Lee" userId="8d4cb33d81fe8010" providerId="LiveId" clId="{95971DB8-E339-4B32-80CF-0D8F9D8B87F2}" dt="2026-02-20T08:53:48.576" v="40" actId="478"/>
-          <ac:spMkLst>
-            <pc:docMk/>
-            <pc:sldMk cId="2758323687" sldId="285"/>
-            <ac:spMk id="6" creationId="{00000000-0000-0000-0000-000000000000}"/>
-          </ac:spMkLst>
-        </pc:spChg>
       </pc:sldChg>
       <pc:sldChg chg="delSp mod">
         <pc:chgData name="Youngho Lee" userId="8d4cb33d81fe8010" providerId="LiveId" clId="{95971DB8-E339-4B32-80CF-0D8F9D8B87F2}" dt="2026-02-20T08:53:45.927" v="39" actId="478"/>
@@ -616,14 +400,6 @@
           <pc:docMk/>
           <pc:sldMk cId="690268307" sldId="286"/>
         </pc:sldMkLst>
-        <pc:spChg chg="del">
-          <ac:chgData name="Youngho Lee" userId="8d4cb33d81fe8010" providerId="LiveId" clId="{95971DB8-E339-4B32-80CF-0D8F9D8B87F2}" dt="2026-02-20T08:53:45.927" v="39" actId="478"/>
-          <ac:spMkLst>
-            <pc:docMk/>
-            <pc:sldMk cId="690268307" sldId="286"/>
-            <ac:spMk id="6" creationId="{00000000-0000-0000-0000-000000000000}"/>
-          </ac:spMkLst>
-        </pc:spChg>
       </pc:sldChg>
       <pc:sldChg chg="modSp add mod">
         <pc:chgData name="Youngho Lee" userId="8d4cb33d81fe8010" providerId="LiveId" clId="{95971DB8-E339-4B32-80CF-0D8F9D8B87F2}" dt="2026-02-20T09:03:50.445" v="51" actId="20577"/>
@@ -18931,45 +18707,6 @@
       </p:sp>
       <p:sp>
         <p:nvSpPr>
-          <p:cNvPr id="12" name="Text 10"/>
-          <p:cNvSpPr/>
-          <p:nvPr/>
-        </p:nvSpPr>
-        <p:spPr>
-          <a:xfrm>
-            <a:off x="1554480" y="2706624"/>
-            <a:ext cx="908274" cy="356616"/>
-          </a:xfrm>
-          <a:prstGeom prst="rect">
-            <a:avLst/>
-          </a:prstGeom>
-          <a:noFill/>
-          <a:ln/>
-        </p:spPr>
-        <p:txBody>
-          <a:bodyPr wrap="square" rtlCol="0" anchor="ctr"/>
-          <a:lstStyle/>
-          <a:p>
-            <a:pPr marL="0" indent="0" algn="ctr">
-              <a:buNone/>
-            </a:pPr>
-            <a:r>
-              <a:rPr lang="en-US" sz="1400" b="1" dirty="0">
-                <a:solidFill>
-                  <a:srgbClr val="FFFFFF"/>
-                </a:solidFill>
-                <a:latin typeface="Malgun Gothic" pitchFamily="34" charset="0"/>
-                <a:ea typeface="Malgun Gothic" pitchFamily="34" charset="-122"/>
-                <a:cs typeface="Malgun Gothic" pitchFamily="34" charset="-120"/>
-              </a:rPr>
-              <a:t>출석 10</a:t>
-            </a:r>
-            <a:endParaRPr lang="en-US" sz="1400" dirty="0"/>
-          </a:p>
-        </p:txBody>
-      </p:sp>
-      <p:sp>
-        <p:nvSpPr>
           <p:cNvPr id="13" name="Shape 11"/>
           <p:cNvSpPr/>
           <p:nvPr/>
@@ -19002,45 +18739,6 @@
       </p:sp>
       <p:sp>
         <p:nvSpPr>
-          <p:cNvPr id="14" name="Text 12"/>
-          <p:cNvSpPr/>
-          <p:nvPr/>
-        </p:nvSpPr>
-        <p:spPr>
-          <a:xfrm>
-            <a:off x="2462754" y="2706624"/>
-            <a:ext cx="2724821" cy="356616"/>
-          </a:xfrm>
-          <a:prstGeom prst="rect">
-            <a:avLst/>
-          </a:prstGeom>
-          <a:noFill/>
-          <a:ln/>
-        </p:spPr>
-        <p:txBody>
-          <a:bodyPr wrap="square" rtlCol="0" anchor="ctr"/>
-          <a:lstStyle/>
-          <a:p>
-            <a:pPr marL="0" indent="0" algn="ctr">
-              <a:buNone/>
-            </a:pPr>
-            <a:r>
-              <a:rPr lang="en-US" sz="1400" b="1" dirty="0">
-                <a:solidFill>
-                  <a:srgbClr val="FFFFFF"/>
-                </a:solidFill>
-                <a:latin typeface="Malgun Gothic" pitchFamily="34" charset="0"/>
-                <a:ea typeface="Malgun Gothic" pitchFamily="34" charset="-122"/>
-                <a:cs typeface="Malgun Gothic" pitchFamily="34" charset="-120"/>
-              </a:rPr>
-              <a:t>중간 30</a:t>
-            </a:r>
-            <a:endParaRPr lang="en-US" sz="1400" dirty="0"/>
-          </a:p>
-        </p:txBody>
-      </p:sp>
-      <p:sp>
-        <p:nvSpPr>
           <p:cNvPr id="15" name="Shape 13"/>
           <p:cNvSpPr/>
           <p:nvPr/>
@@ -19073,45 +18771,6 @@
       </p:sp>
       <p:sp>
         <p:nvSpPr>
-          <p:cNvPr id="16" name="Text 14"/>
-          <p:cNvSpPr/>
-          <p:nvPr/>
-        </p:nvSpPr>
-        <p:spPr>
-          <a:xfrm>
-            <a:off x="5187574" y="2706624"/>
-            <a:ext cx="2724821" cy="356616"/>
-          </a:xfrm>
-          <a:prstGeom prst="rect">
-            <a:avLst/>
-          </a:prstGeom>
-          <a:noFill/>
-          <a:ln/>
-        </p:spPr>
-        <p:txBody>
-          <a:bodyPr wrap="square" rtlCol="0" anchor="ctr"/>
-          <a:lstStyle/>
-          <a:p>
-            <a:pPr marL="0" indent="0" algn="ctr">
-              <a:buNone/>
-            </a:pPr>
-            <a:r>
-              <a:rPr lang="en-US" sz="1400" b="1" dirty="0">
-                <a:solidFill>
-                  <a:srgbClr val="FFFFFF"/>
-                </a:solidFill>
-                <a:latin typeface="Malgun Gothic" pitchFamily="34" charset="0"/>
-                <a:ea typeface="Malgun Gothic" pitchFamily="34" charset="-122"/>
-                <a:cs typeface="Malgun Gothic" pitchFamily="34" charset="-120"/>
-              </a:rPr>
-              <a:t>기말 30</a:t>
-            </a:r>
-            <a:endParaRPr lang="en-US" sz="1400" dirty="0"/>
-          </a:p>
-        </p:txBody>
-      </p:sp>
-      <p:sp>
-        <p:nvSpPr>
           <p:cNvPr id="17" name="Shape 15"/>
           <p:cNvSpPr/>
           <p:nvPr/>
@@ -19139,45 +18798,6 @@
           <a:lstStyle/>
           <a:p>
             <a:endParaRPr lang="ko-KR" altLang="en-US"/>
-          </a:p>
-        </p:txBody>
-      </p:sp>
-      <p:sp>
-        <p:nvSpPr>
-          <p:cNvPr id="18" name="Text 16"/>
-          <p:cNvSpPr/>
-          <p:nvPr/>
-        </p:nvSpPr>
-        <p:spPr>
-          <a:xfrm>
-            <a:off x="7912395" y="2706624"/>
-            <a:ext cx="2724821" cy="356616"/>
-          </a:xfrm>
-          <a:prstGeom prst="rect">
-            <a:avLst/>
-          </a:prstGeom>
-          <a:noFill/>
-          <a:ln/>
-        </p:spPr>
-        <p:txBody>
-          <a:bodyPr wrap="square" rtlCol="0" anchor="ctr"/>
-          <a:lstStyle/>
-          <a:p>
-            <a:pPr marL="0" indent="0" algn="ctr">
-              <a:buNone/>
-            </a:pPr>
-            <a:r>
-              <a:rPr lang="en-US" sz="1400" b="1" dirty="0">
-                <a:solidFill>
-                  <a:srgbClr val="FFFFFF"/>
-                </a:solidFill>
-                <a:latin typeface="Malgun Gothic" pitchFamily="34" charset="0"/>
-                <a:ea typeface="Malgun Gothic" pitchFamily="34" charset="-122"/>
-                <a:cs typeface="Malgun Gothic" pitchFamily="34" charset="-120"/>
-              </a:rPr>
-              <a:t>과제 30</a:t>
-            </a:r>
-            <a:endParaRPr lang="en-US" sz="1400" dirty="0"/>
           </a:p>
         </p:txBody>
       </p:sp>
